--- a/snow_blower.pptx
+++ b/snow_blower.pptx
@@ -259,7 +259,7 @@
           <a:lstStyle/>
           <a:p>
             <a:fld id="{5F491023-0B0A-7041-9F06-D25A50EF063B}" type="datetimeFigureOut">
-              <a:t>12/13/22</a:t>
+              <a:t>12/14/22</a:t>
             </a:fld>
             <a:endParaRPr lang="en-US"/>
           </a:p>
@@ -455,7 +455,7 @@
           <a:lstStyle/>
           <a:p>
             <a:fld id="{5F491023-0B0A-7041-9F06-D25A50EF063B}" type="datetimeFigureOut">
-              <a:t>12/13/22</a:t>
+              <a:t>12/14/22</a:t>
             </a:fld>
             <a:endParaRPr lang="en-US"/>
           </a:p>
@@ -661,7 +661,7 @@
           <a:lstStyle/>
           <a:p>
             <a:fld id="{5F491023-0B0A-7041-9F06-D25A50EF063B}" type="datetimeFigureOut">
-              <a:t>12/13/22</a:t>
+              <a:t>12/14/22</a:t>
             </a:fld>
             <a:endParaRPr lang="en-US"/>
           </a:p>
@@ -857,7 +857,7 @@
           <a:lstStyle/>
           <a:p>
             <a:fld id="{5F491023-0B0A-7041-9F06-D25A50EF063B}" type="datetimeFigureOut">
-              <a:t>12/13/22</a:t>
+              <a:t>12/14/22</a:t>
             </a:fld>
             <a:endParaRPr lang="en-US"/>
           </a:p>
@@ -1130,7 +1130,7 @@
           <a:lstStyle/>
           <a:p>
             <a:fld id="{5F491023-0B0A-7041-9F06-D25A50EF063B}" type="datetimeFigureOut">
-              <a:t>12/13/22</a:t>
+              <a:t>12/14/22</a:t>
             </a:fld>
             <a:endParaRPr lang="en-US"/>
           </a:p>
@@ -1393,7 +1393,7 @@
           <a:lstStyle/>
           <a:p>
             <a:fld id="{5F491023-0B0A-7041-9F06-D25A50EF063B}" type="datetimeFigureOut">
-              <a:t>12/13/22</a:t>
+              <a:t>12/14/22</a:t>
             </a:fld>
             <a:endParaRPr lang="en-US"/>
           </a:p>
@@ -1803,7 +1803,7 @@
           <a:lstStyle/>
           <a:p>
             <a:fld id="{5F491023-0B0A-7041-9F06-D25A50EF063B}" type="datetimeFigureOut">
-              <a:t>12/13/22</a:t>
+              <a:t>12/14/22</a:t>
             </a:fld>
             <a:endParaRPr lang="en-US"/>
           </a:p>
@@ -1942,7 +1942,7 @@
           <a:lstStyle/>
           <a:p>
             <a:fld id="{5F491023-0B0A-7041-9F06-D25A50EF063B}" type="datetimeFigureOut">
-              <a:t>12/13/22</a:t>
+              <a:t>12/14/22</a:t>
             </a:fld>
             <a:endParaRPr lang="en-US"/>
           </a:p>
@@ -2053,7 +2053,7 @@
           <a:lstStyle/>
           <a:p>
             <a:fld id="{5F491023-0B0A-7041-9F06-D25A50EF063B}" type="datetimeFigureOut">
-              <a:t>12/13/22</a:t>
+              <a:t>12/14/22</a:t>
             </a:fld>
             <a:endParaRPr lang="en-US"/>
           </a:p>
@@ -2362,7 +2362,7 @@
           <a:lstStyle/>
           <a:p>
             <a:fld id="{5F491023-0B0A-7041-9F06-D25A50EF063B}" type="datetimeFigureOut">
-              <a:t>12/13/22</a:t>
+              <a:t>12/14/22</a:t>
             </a:fld>
             <a:endParaRPr lang="en-US"/>
           </a:p>
@@ -2648,7 +2648,7 @@
           <a:lstStyle/>
           <a:p>
             <a:fld id="{5F491023-0B0A-7041-9F06-D25A50EF063B}" type="datetimeFigureOut">
-              <a:t>12/13/22</a:t>
+              <a:t>12/14/22</a:t>
             </a:fld>
             <a:endParaRPr lang="en-US"/>
           </a:p>
@@ -2887,7 +2887,7 @@
           </a:lstStyle>
           <a:p>
             <a:fld id="{5F491023-0B0A-7041-9F06-D25A50EF063B}" type="datetimeFigureOut">
-              <a:t>12/13/22</a:t>
+              <a:t>12/14/22</a:t>
             </a:fld>
             <a:endParaRPr lang="en-US"/>
           </a:p>
@@ -3583,7 +3583,13 @@
           <p:nvPr/>
         </p:nvPicPr>
         <p:blipFill>
-          <a:blip r:embed="rId2"/>
+          <a:blip r:embed="rId2" cstate="email">
+            <a:extLst>
+              <a:ext uri="{28A0092B-C50C-407E-A947-70E740481C1C}">
+                <a14:useLocalDpi xmlns:a14="http://schemas.microsoft.com/office/drawing/2010/main"/>
+              </a:ext>
+            </a:extLst>
+          </a:blip>
           <a:stretch>
             <a:fillRect/>
           </a:stretch>
@@ -3613,7 +3619,13 @@
           <p:nvPr/>
         </p:nvPicPr>
         <p:blipFill>
-          <a:blip r:embed="rId3"/>
+          <a:blip r:embed="rId3" cstate="email">
+            <a:extLst>
+              <a:ext uri="{28A0092B-C50C-407E-A947-70E740481C1C}">
+                <a14:useLocalDpi xmlns:a14="http://schemas.microsoft.com/office/drawing/2010/main"/>
+              </a:ext>
+            </a:extLst>
+          </a:blip>
           <a:stretch>
             <a:fillRect/>
           </a:stretch>
@@ -3679,7 +3691,13 @@
           <p:nvPr/>
         </p:nvPicPr>
         <p:blipFill>
-          <a:blip r:embed="rId4"/>
+          <a:blip r:embed="rId4" cstate="email">
+            <a:extLst>
+              <a:ext uri="{28A0092B-C50C-407E-A947-70E740481C1C}">
+                <a14:useLocalDpi xmlns:a14="http://schemas.microsoft.com/office/drawing/2010/main"/>
+              </a:ext>
+            </a:extLst>
+          </a:blip>
           <a:stretch>
             <a:fillRect/>
           </a:stretch>
@@ -3752,7 +3770,13 @@
           <p:nvPr/>
         </p:nvPicPr>
         <p:blipFill>
-          <a:blip r:embed="rId5"/>
+          <a:blip r:embed="rId5" cstate="email">
+            <a:extLst>
+              <a:ext uri="{28A0092B-C50C-407E-A947-70E740481C1C}">
+                <a14:useLocalDpi xmlns:a14="http://schemas.microsoft.com/office/drawing/2010/main"/>
+              </a:ext>
+            </a:extLst>
+          </a:blip>
           <a:stretch>
             <a:fillRect/>
           </a:stretch>
@@ -3933,10 +3957,10 @@
           <p:nvPr/>
         </p:nvPicPr>
         <p:blipFill>
-          <a:blip r:embed="rId3">
+          <a:blip r:embed="rId3" cstate="email">
             <a:extLst>
               <a:ext uri="{28A0092B-C50C-407E-A947-70E740481C1C}">
-                <a14:useLocalDpi xmlns:a14="http://schemas.microsoft.com/office/drawing/2010/main" val="0"/>
+                <a14:useLocalDpi xmlns:a14="http://schemas.microsoft.com/office/drawing/2010/main"/>
               </a:ext>
             </a:extLst>
           </a:blip>
@@ -3980,10 +4004,10 @@
           <p:nvPr/>
         </p:nvPicPr>
         <p:blipFill>
-          <a:blip r:embed="rId4">
+          <a:blip r:embed="rId4" cstate="email">
             <a:extLst>
               <a:ext uri="{28A0092B-C50C-407E-A947-70E740481C1C}">
-                <a14:useLocalDpi xmlns:a14="http://schemas.microsoft.com/office/drawing/2010/main" val="0"/>
+                <a14:useLocalDpi xmlns:a14="http://schemas.microsoft.com/office/drawing/2010/main"/>
               </a:ext>
             </a:extLst>
           </a:blip>
@@ -4233,10 +4257,10 @@
           <p:nvPr/>
         </p:nvPicPr>
         <p:blipFill>
-          <a:blip r:embed="rId5">
+          <a:blip r:embed="rId5" cstate="email">
             <a:extLst>
               <a:ext uri="{28A0092B-C50C-407E-A947-70E740481C1C}">
-                <a14:useLocalDpi xmlns:a14="http://schemas.microsoft.com/office/drawing/2010/main" val="0"/>
+                <a14:useLocalDpi xmlns:a14="http://schemas.microsoft.com/office/drawing/2010/main"/>
               </a:ext>
             </a:extLst>
           </a:blip>
@@ -4524,10 +4548,10 @@
           <p:nvPr/>
         </p:nvPicPr>
         <p:blipFill>
-          <a:blip r:embed="rId6">
+          <a:blip r:embed="rId6" cstate="email">
             <a:extLst>
               <a:ext uri="{28A0092B-C50C-407E-A947-70E740481C1C}">
-                <a14:useLocalDpi xmlns:a14="http://schemas.microsoft.com/office/drawing/2010/main" val="0"/>
+                <a14:useLocalDpi xmlns:a14="http://schemas.microsoft.com/office/drawing/2010/main"/>
               </a:ext>
             </a:extLst>
           </a:blip>
@@ -4665,10 +4689,10 @@
           <p:nvPr/>
         </p:nvPicPr>
         <p:blipFill>
-          <a:blip r:embed="rId7">
+          <a:blip r:embed="rId7" cstate="email">
             <a:extLst>
               <a:ext uri="{28A0092B-C50C-407E-A947-70E740481C1C}">
-                <a14:useLocalDpi xmlns:a14="http://schemas.microsoft.com/office/drawing/2010/main" val="0"/>
+                <a14:useLocalDpi xmlns:a14="http://schemas.microsoft.com/office/drawing/2010/main"/>
               </a:ext>
             </a:extLst>
           </a:blip>
@@ -4886,10 +4910,10 @@
           <p:nvPr/>
         </p:nvPicPr>
         <p:blipFill>
-          <a:blip r:embed="rId8">
+          <a:blip r:embed="rId8" cstate="email">
             <a:extLst>
               <a:ext uri="{28A0092B-C50C-407E-A947-70E740481C1C}">
-                <a14:useLocalDpi xmlns:a14="http://schemas.microsoft.com/office/drawing/2010/main" val="0"/>
+                <a14:useLocalDpi xmlns:a14="http://schemas.microsoft.com/office/drawing/2010/main"/>
               </a:ext>
             </a:extLst>
           </a:blip>

--- a/snow_blower.pptx
+++ b/snow_blower.pptx
@@ -7,6 +7,7 @@
   <p:sldIdLst>
     <p:sldId id="261" r:id="rId2"/>
     <p:sldId id="262" r:id="rId3"/>
+    <p:sldId id="263" r:id="rId4"/>
   </p:sldIdLst>
   <p:sldSz cx="12192000" cy="6858000"/>
   <p:notesSz cx="6858000" cy="9144000"/>
@@ -259,7 +260,7 @@
           <a:lstStyle/>
           <a:p>
             <a:fld id="{5F491023-0B0A-7041-9F06-D25A50EF063B}" type="datetimeFigureOut">
-              <a:t>12/14/22</a:t>
+              <a:t>12/15/22</a:t>
             </a:fld>
             <a:endParaRPr lang="en-US"/>
           </a:p>
@@ -455,7 +456,7 @@
           <a:lstStyle/>
           <a:p>
             <a:fld id="{5F491023-0B0A-7041-9F06-D25A50EF063B}" type="datetimeFigureOut">
-              <a:t>12/14/22</a:t>
+              <a:t>12/15/22</a:t>
             </a:fld>
             <a:endParaRPr lang="en-US"/>
           </a:p>
@@ -661,7 +662,7 @@
           <a:lstStyle/>
           <a:p>
             <a:fld id="{5F491023-0B0A-7041-9F06-D25A50EF063B}" type="datetimeFigureOut">
-              <a:t>12/14/22</a:t>
+              <a:t>12/15/22</a:t>
             </a:fld>
             <a:endParaRPr lang="en-US"/>
           </a:p>
@@ -857,7 +858,7 @@
           <a:lstStyle/>
           <a:p>
             <a:fld id="{5F491023-0B0A-7041-9F06-D25A50EF063B}" type="datetimeFigureOut">
-              <a:t>12/14/22</a:t>
+              <a:t>12/15/22</a:t>
             </a:fld>
             <a:endParaRPr lang="en-US"/>
           </a:p>
@@ -1130,7 +1131,7 @@
           <a:lstStyle/>
           <a:p>
             <a:fld id="{5F491023-0B0A-7041-9F06-D25A50EF063B}" type="datetimeFigureOut">
-              <a:t>12/14/22</a:t>
+              <a:t>12/15/22</a:t>
             </a:fld>
             <a:endParaRPr lang="en-US"/>
           </a:p>
@@ -1393,7 +1394,7 @@
           <a:lstStyle/>
           <a:p>
             <a:fld id="{5F491023-0B0A-7041-9F06-D25A50EF063B}" type="datetimeFigureOut">
-              <a:t>12/14/22</a:t>
+              <a:t>12/15/22</a:t>
             </a:fld>
             <a:endParaRPr lang="en-US"/>
           </a:p>
@@ -1803,7 +1804,7 @@
           <a:lstStyle/>
           <a:p>
             <a:fld id="{5F491023-0B0A-7041-9F06-D25A50EF063B}" type="datetimeFigureOut">
-              <a:t>12/14/22</a:t>
+              <a:t>12/15/22</a:t>
             </a:fld>
             <a:endParaRPr lang="en-US"/>
           </a:p>
@@ -1942,7 +1943,7 @@
           <a:lstStyle/>
           <a:p>
             <a:fld id="{5F491023-0B0A-7041-9F06-D25A50EF063B}" type="datetimeFigureOut">
-              <a:t>12/14/22</a:t>
+              <a:t>12/15/22</a:t>
             </a:fld>
             <a:endParaRPr lang="en-US"/>
           </a:p>
@@ -2053,7 +2054,7 @@
           <a:lstStyle/>
           <a:p>
             <a:fld id="{5F491023-0B0A-7041-9F06-D25A50EF063B}" type="datetimeFigureOut">
-              <a:t>12/14/22</a:t>
+              <a:t>12/15/22</a:t>
             </a:fld>
             <a:endParaRPr lang="en-US"/>
           </a:p>
@@ -2362,7 +2363,7 @@
           <a:lstStyle/>
           <a:p>
             <a:fld id="{5F491023-0B0A-7041-9F06-D25A50EF063B}" type="datetimeFigureOut">
-              <a:t>12/14/22</a:t>
+              <a:t>12/15/22</a:t>
             </a:fld>
             <a:endParaRPr lang="en-US"/>
           </a:p>
@@ -2648,7 +2649,7 @@
           <a:lstStyle/>
           <a:p>
             <a:fld id="{5F491023-0B0A-7041-9F06-D25A50EF063B}" type="datetimeFigureOut">
-              <a:t>12/14/22</a:t>
+              <a:t>12/15/22</a:t>
             </a:fld>
             <a:endParaRPr lang="en-US"/>
           </a:p>
@@ -2887,7 +2888,7 @@
           </a:lstStyle>
           <a:p>
             <a:fld id="{5F491023-0B0A-7041-9F06-D25A50EF063B}" type="datetimeFigureOut">
-              <a:t>12/14/22</a:t>
+              <a:t>12/15/22</a:t>
             </a:fld>
             <a:endParaRPr lang="en-US"/>
           </a:p>
@@ -5209,6 +5210,309 @@
 </p:sld>
 </file>
 
+<file path=ppt/slides/slide3.xml><?xml version="1.0" encoding="utf-8"?>
+<p:sld xmlns:a="http://schemas.openxmlformats.org/drawingml/2006/main" xmlns:r="http://schemas.openxmlformats.org/officeDocument/2006/relationships" xmlns:p="http://schemas.openxmlformats.org/presentationml/2006/main">
+  <p:cSld>
+    <p:spTree>
+      <p:nvGrpSpPr>
+        <p:cNvPr id="1" name=""/>
+        <p:cNvGrpSpPr/>
+        <p:nvPr/>
+      </p:nvGrpSpPr>
+      <p:grpSpPr>
+        <a:xfrm>
+          <a:off x="0" y="0"/>
+          <a:ext cx="0" cy="0"/>
+          <a:chOff x="0" y="0"/>
+          <a:chExt cx="0" cy="0"/>
+        </a:xfrm>
+      </p:grpSpPr>
+      <p:sp>
+        <p:nvSpPr>
+          <p:cNvPr id="2" name="TextBox 1">
+            <a:extLst>
+              <a:ext uri="{FF2B5EF4-FFF2-40B4-BE49-F238E27FC236}">
+                <a16:creationId xmlns:a16="http://schemas.microsoft.com/office/drawing/2014/main" id="{0F0FA36D-3404-1E9C-B96C-7A351AA9B517}"/>
+              </a:ext>
+            </a:extLst>
+          </p:cNvPr>
+          <p:cNvSpPr txBox="1"/>
+          <p:nvPr/>
+        </p:nvSpPr>
+        <p:spPr>
+          <a:xfrm>
+            <a:off x="143219" y="198304"/>
+            <a:ext cx="5508434" cy="369332"/>
+          </a:xfrm>
+          <a:prstGeom prst="rect">
+            <a:avLst/>
+          </a:prstGeom>
+          <a:noFill/>
+        </p:spPr>
+        <p:txBody>
+          <a:bodyPr wrap="square" rtlCol="0">
+            <a:spAutoFit/>
+          </a:bodyPr>
+          <a:lstStyle/>
+          <a:p>
+            <a:r>
+              <a:rPr lang="en-US" dirty="0"/>
+              <a:t>I bought used Honda HS724 in December 2022</a:t>
+            </a:r>
+          </a:p>
+        </p:txBody>
+      </p:sp>
+      <p:pic>
+        <p:nvPicPr>
+          <p:cNvPr id="4" name="Picture 3" descr="A red and black scooter&#10;&#10;Description automatically generated with low confidence">
+            <a:extLst>
+              <a:ext uri="{FF2B5EF4-FFF2-40B4-BE49-F238E27FC236}">
+                <a16:creationId xmlns:a16="http://schemas.microsoft.com/office/drawing/2014/main" id="{3AABDACA-0AB8-B0D7-0329-62D866CE1A82}"/>
+              </a:ext>
+            </a:extLst>
+          </p:cNvPr>
+          <p:cNvPicPr>
+            <a:picLocks noChangeAspect="1"/>
+          </p:cNvPicPr>
+          <p:nvPr/>
+        </p:nvPicPr>
+        <p:blipFill>
+          <a:blip r:embed="rId2" cstate="email">
+            <a:extLst>
+              <a:ext uri="{28A0092B-C50C-407E-A947-70E740481C1C}">
+                <a14:useLocalDpi xmlns:a14="http://schemas.microsoft.com/office/drawing/2010/main"/>
+              </a:ext>
+            </a:extLst>
+          </a:blip>
+          <a:stretch>
+            <a:fillRect/>
+          </a:stretch>
+        </p:blipFill>
+        <p:spPr>
+          <a:xfrm>
+            <a:off x="231355" y="567636"/>
+            <a:ext cx="3775494" cy="3132998"/>
+          </a:xfrm>
+          <a:prstGeom prst="rect">
+            <a:avLst/>
+          </a:prstGeom>
+        </p:spPr>
+      </p:pic>
+      <p:sp>
+        <p:nvSpPr>
+          <p:cNvPr id="5" name="TextBox 4">
+            <a:extLst>
+              <a:ext uri="{FF2B5EF4-FFF2-40B4-BE49-F238E27FC236}">
+                <a16:creationId xmlns:a16="http://schemas.microsoft.com/office/drawing/2014/main" id="{0636B2B5-1999-2E14-87CC-3DF7FBAA2DE6}"/>
+              </a:ext>
+            </a:extLst>
+          </p:cNvPr>
+          <p:cNvSpPr txBox="1"/>
+          <p:nvPr/>
+        </p:nvSpPr>
+        <p:spPr>
+          <a:xfrm>
+            <a:off x="231355" y="3800819"/>
+            <a:ext cx="5023691" cy="1600438"/>
+          </a:xfrm>
+          <a:prstGeom prst="rect">
+            <a:avLst/>
+          </a:prstGeom>
+          <a:noFill/>
+        </p:spPr>
+        <p:txBody>
+          <a:bodyPr wrap="square" rtlCol="0">
+            <a:spAutoFit/>
+          </a:bodyPr>
+          <a:lstStyle/>
+          <a:p>
+            <a:r>
+              <a:rPr lang="en-US" sz="1400" dirty="0"/>
+              <a:t>Missing lamp/light.</a:t>
+            </a:r>
+          </a:p>
+          <a:p>
+            <a:endParaRPr lang="en-US" sz="1400" dirty="0"/>
+          </a:p>
+          <a:p>
+            <a:r>
+              <a:rPr lang="en-US" sz="1400" dirty="0"/>
+              <a:t>The manual shows copyright year 2001.</a:t>
+            </a:r>
+          </a:p>
+          <a:p>
+            <a:r>
+              <a:rPr lang="en-US" sz="1400" dirty="0"/>
+              <a:t>Honda Engine Serial # GCAE-2072409</a:t>
+            </a:r>
+          </a:p>
+          <a:p>
+            <a:r>
+              <a:rPr lang="en-US" sz="1400" dirty="0"/>
+              <a:t>The label on the frame says that </a:t>
+            </a:r>
+          </a:p>
+          <a:p>
+            <a:r>
+              <a:rPr lang="en-US" sz="1400" dirty="0"/>
+              <a:t>it meets the US "EPA SNRE PH2 2007",</a:t>
+            </a:r>
+          </a:p>
+          <a:p>
+            <a:r>
+              <a:rPr lang="en-US" sz="1400" dirty="0"/>
+              <a:t>Does "2007" mean the year?</a:t>
+            </a:r>
+          </a:p>
+        </p:txBody>
+      </p:sp>
+      <p:sp>
+        <p:nvSpPr>
+          <p:cNvPr id="7" name="TextBox 6">
+            <a:extLst>
+              <a:ext uri="{FF2B5EF4-FFF2-40B4-BE49-F238E27FC236}">
+                <a16:creationId xmlns:a16="http://schemas.microsoft.com/office/drawing/2014/main" id="{8F08E506-EE81-F20C-0E9D-9AA173A05D6A}"/>
+              </a:ext>
+            </a:extLst>
+          </p:cNvPr>
+          <p:cNvSpPr txBox="1"/>
+          <p:nvPr/>
+        </p:nvSpPr>
+        <p:spPr>
+          <a:xfrm>
+            <a:off x="231355" y="5689678"/>
+            <a:ext cx="6097836" cy="261610"/>
+          </a:xfrm>
+          <a:prstGeom prst="rect">
+            <a:avLst/>
+          </a:prstGeom>
+          <a:noFill/>
+        </p:spPr>
+        <p:txBody>
+          <a:bodyPr wrap="square">
+            <a:spAutoFit/>
+          </a:bodyPr>
+          <a:lstStyle/>
+          <a:p>
+            <a:r>
+              <a:rPr lang="en-US" sz="1100" dirty="0">
+                <a:hlinkClick r:id="rId3"/>
+              </a:rPr>
+              <a:t>https://</a:t>
+            </a:r>
+            <a:r>
+              <a:rPr lang="en-US" sz="1100" dirty="0" err="1">
+                <a:hlinkClick r:id="rId3"/>
+              </a:rPr>
+              <a:t>www.jackssmallengines.com</a:t>
+            </a:r>
+            <a:r>
+              <a:rPr lang="en-US" sz="1100" dirty="0">
+                <a:hlinkClick r:id="rId3"/>
+              </a:rPr>
+              <a:t>/jacks-parts-lookup/manufacturer/</a:t>
+            </a:r>
+            <a:r>
+              <a:rPr lang="en-US" sz="1100" dirty="0" err="1">
+                <a:hlinkClick r:id="rId3"/>
+              </a:rPr>
+              <a:t>honda</a:t>
+            </a:r>
+            <a:r>
+              <a:rPr lang="en-US" sz="1100" dirty="0">
+                <a:hlinkClick r:id="rId3"/>
+              </a:rPr>
+              <a:t>/snow-blower</a:t>
+            </a:r>
+            <a:endParaRPr lang="en-US" sz="1100" dirty="0"/>
+          </a:p>
+        </p:txBody>
+      </p:sp>
+      <p:pic>
+        <p:nvPicPr>
+          <p:cNvPr id="8" name="Picture 7">
+            <a:extLst>
+              <a:ext uri="{FF2B5EF4-FFF2-40B4-BE49-F238E27FC236}">
+                <a16:creationId xmlns:a16="http://schemas.microsoft.com/office/drawing/2014/main" id="{15DC80F7-877D-49F6-94F9-AE43F0D044C7}"/>
+              </a:ext>
+            </a:extLst>
+          </p:cNvPr>
+          <p:cNvPicPr>
+            <a:picLocks noChangeAspect="1"/>
+          </p:cNvPicPr>
+          <p:nvPr/>
+        </p:nvPicPr>
+        <p:blipFill>
+          <a:blip r:embed="rId4" cstate="email">
+            <a:extLst>
+              <a:ext uri="{28A0092B-C50C-407E-A947-70E740481C1C}">
+                <a14:useLocalDpi xmlns:a14="http://schemas.microsoft.com/office/drawing/2010/main"/>
+              </a:ext>
+            </a:extLst>
+          </a:blip>
+          <a:stretch>
+            <a:fillRect/>
+          </a:stretch>
+        </p:blipFill>
+        <p:spPr>
+          <a:xfrm>
+            <a:off x="6180462" y="4630677"/>
+            <a:ext cx="4605969" cy="1541160"/>
+          </a:xfrm>
+          <a:prstGeom prst="rect">
+            <a:avLst/>
+          </a:prstGeom>
+        </p:spPr>
+      </p:pic>
+      <p:pic>
+        <p:nvPicPr>
+          <p:cNvPr id="9" name="Picture 8">
+            <a:extLst>
+              <a:ext uri="{FF2B5EF4-FFF2-40B4-BE49-F238E27FC236}">
+                <a16:creationId xmlns:a16="http://schemas.microsoft.com/office/drawing/2014/main" id="{8CAB719C-E22E-C395-361C-38141FF68A64}"/>
+              </a:ext>
+            </a:extLst>
+          </p:cNvPr>
+          <p:cNvPicPr>
+            <a:picLocks noChangeAspect="1"/>
+          </p:cNvPicPr>
+          <p:nvPr/>
+        </p:nvPicPr>
+        <p:blipFill>
+          <a:blip r:embed="rId5" cstate="email">
+            <a:extLst>
+              <a:ext uri="{28A0092B-C50C-407E-A947-70E740481C1C}">
+                <a14:useLocalDpi xmlns:a14="http://schemas.microsoft.com/office/drawing/2010/main"/>
+              </a:ext>
+            </a:extLst>
+          </a:blip>
+          <a:stretch>
+            <a:fillRect/>
+          </a:stretch>
+        </p:blipFill>
+        <p:spPr>
+          <a:xfrm>
+            <a:off x="6180462" y="3356167"/>
+            <a:ext cx="3683000" cy="1130300"/>
+          </a:xfrm>
+          <a:prstGeom prst="rect">
+            <a:avLst/>
+          </a:prstGeom>
+        </p:spPr>
+      </p:pic>
+    </p:spTree>
+    <p:extLst>
+      <p:ext uri="{BB962C8B-B14F-4D97-AF65-F5344CB8AC3E}">
+        <p14:creationId xmlns:p14="http://schemas.microsoft.com/office/powerpoint/2010/main" val="1462267718"/>
+      </p:ext>
+    </p:extLst>
+  </p:cSld>
+  <p:clrMapOvr>
+    <a:masterClrMapping/>
+  </p:clrMapOvr>
+</p:sld>
+</file>
+
 <file path=ppt/theme/theme1.xml><?xml version="1.0" encoding="utf-8"?>
 <a:theme xmlns:a="http://schemas.openxmlformats.org/drawingml/2006/main" name="Office Theme">
   <a:themeElements>
